--- a/NLP_TM/17-POSNER.pptx
+++ b/NLP_TM/17-POSNER.pptx
@@ -277,7 +277,7 @@
             <a:fld id="{D3E28C4F-4FE9-4D22-93D8-487A4D01D983}" type="datetimeFigureOut">
               <a:rPr lang="en-US" smtClean="0"/>
               <a:pPr/>
-              <a:t>3/11/2024</a:t>
+              <a:t>5/4/2026</a:t>
             </a:fld>
             <a:endParaRPr lang="en-US"/>
           </a:p>
@@ -444,7 +444,7 @@
             <a:fld id="{EE18CB36-612C-4E4A-AC83-E89476AEC2BF}" type="datetimeFigureOut">
               <a:rPr lang="en-US" smtClean="0"/>
               <a:pPr/>
-              <a:t>3/11/2024</a:t>
+              <a:t>5/4/2026</a:t>
             </a:fld>
             <a:endParaRPr lang="en-US"/>
           </a:p>
@@ -934,32 +934,16 @@
           <a:p>
             <a:r>
               <a:rPr lang="en-US" dirty="0"/>
-              <a:t>How accurate are modern POS taggers? Quite accurate; for English, and a for a few other languages </a:t>
-            </a:r>
-            <a:r>
-              <a:rPr lang="en-US" dirty="0" smtClean="0"/>
-              <a:t>where </a:t>
-            </a:r>
+              <a:t>How accurate are modern POS taggers? Quite accurate; for English, and a for a few other languages where we have sufficient hand-labeled training data, and which have sufficiently simple morphology,  tagging is a mostly solved problem.</a:t>
+            </a:r>
+          </a:p>
+          <a:p>
+            <a:endParaRPr lang="en-US" dirty="0"/>
+          </a:p>
+          <a:p>
             <a:r>
               <a:rPr lang="en-US" dirty="0"/>
-              <a:t>we have sufficient hand-labeled training data, and which have sufficiently simple morphology,  tagging is a mostly solved problem.</a:t>
-            </a:r>
-          </a:p>
-          <a:p>
-            <a:endParaRPr lang="en-US" dirty="0"/>
-          </a:p>
-          <a:p>
-            <a:r>
-              <a:rPr lang="en-US" dirty="0"/>
-              <a:t>The accuracy, that is, the </a:t>
-            </a:r>
-            <a:r>
-              <a:rPr lang="en-US" dirty="0" smtClean="0"/>
-              <a:t>percentage </a:t>
-            </a:r>
-            <a:r>
-              <a:rPr lang="en-US" dirty="0"/>
-              <a:t>of tokens that the tagger assigns the correct tag to, is about 97% </a:t>
+              <a:t>The accuracy, that is, the percentage of tokens that the tagger assigns the correct tag to, is about 97% </a:t>
             </a:r>
           </a:p>
           <a:p>
@@ -3259,31 +3243,7 @@
                 <a:ea typeface="+mn-ea"/>
                 <a:cs typeface="+mn-cs"/>
               </a:rPr>
-              <a:t>tagging.  Notice we have tags </a:t>
-            </a:r>
-            <a:r>
-              <a:rPr lang="en-US" sz="1200" kern="1200" dirty="0" smtClean="0">
-                <a:solidFill>
-                  <a:schemeClr val="tx1"/>
-                </a:solidFill>
-                <a:effectLst/>
-                <a:latin typeface="+mn-lt"/>
-                <a:ea typeface="+mn-ea"/>
-                <a:cs typeface="+mn-cs"/>
-              </a:rPr>
-              <a:t>corresponding </a:t>
-            </a:r>
-            <a:r>
-              <a:rPr lang="en-US" sz="1200" kern="1200" dirty="0">
-                <a:solidFill>
-                  <a:schemeClr val="tx1"/>
-                </a:solidFill>
-                <a:effectLst/>
-                <a:latin typeface="+mn-lt"/>
-                <a:ea typeface="+mn-ea"/>
-                <a:cs typeface="+mn-cs"/>
-              </a:rPr>
-              <a:t>to people, organizations, and locations.  And now we have one tag per token.</a:t>
+              <a:t>tagging.  Notice we have tags corresponding to people, organizations, and locations.  And now we have one tag per token.</a:t>
             </a:r>
             <a:endParaRPr lang="en-US" dirty="0"/>
           </a:p>
@@ -3687,15 +3647,7 @@
           <a:p>
             <a:r>
               <a:rPr lang="en-US" dirty="0"/>
-              <a:t>There are variants of BIO tagging in which there is no B tag, or in which we add an End tag, or a </a:t>
-            </a:r>
-            <a:r>
-              <a:rPr lang="en-US" dirty="0" smtClean="0"/>
-              <a:t>Single </a:t>
-            </a:r>
-            <a:r>
-              <a:rPr lang="en-US" dirty="0"/>
-              <a:t>tag for single-words</a:t>
+              <a:t>There are variants of BIO tagging in which there is no B tag, or in which we add an End tag, or a Single tag for single-words</a:t>
             </a:r>
           </a:p>
         </p:txBody>
@@ -6927,7 +6879,7 @@
           <a:p>
             <a:fld id="{240CDC23-E565-C848-9AF6-12BD09C53D91}" type="datetimeFigureOut">
               <a:rPr lang="en-US" smtClean="0"/>
-              <a:t>3/11/2024</a:t>
+              <a:t>5/4/2026</a:t>
             </a:fld>
             <a:endParaRPr lang="en-US"/>
           </a:p>
@@ -7169,7 +7121,7 @@
           <a:p>
             <a:fld id="{240CDC23-E565-C848-9AF6-12BD09C53D91}" type="datetimeFigureOut">
               <a:rPr lang="en-US" smtClean="0"/>
-              <a:t>3/11/2024</a:t>
+              <a:t>5/4/2026</a:t>
             </a:fld>
             <a:endParaRPr lang="en-US"/>
           </a:p>
@@ -7446,7 +7398,7 @@
           <a:p>
             <a:fld id="{240CDC23-E565-C848-9AF6-12BD09C53D91}" type="datetimeFigureOut">
               <a:rPr lang="en-US" smtClean="0"/>
-              <a:t>3/11/2024</a:t>
+              <a:t>5/4/2026</a:t>
             </a:fld>
             <a:endParaRPr lang="en-US"/>
           </a:p>
@@ -7825,7 +7777,7 @@
           <a:p>
             <a:fld id="{240CDC23-E565-C848-9AF6-12BD09C53D91}" type="datetimeFigureOut">
               <a:rPr lang="en-US" smtClean="0"/>
-              <a:t>3/11/2024</a:t>
+              <a:t>5/4/2026</a:t>
             </a:fld>
             <a:endParaRPr lang="en-US"/>
           </a:p>
@@ -8690,7 +8642,7 @@
           <a:p>
             <a:fld id="{240CDC23-E565-C848-9AF6-12BD09C53D91}" type="datetimeFigureOut">
               <a:rPr lang="en-US" smtClean="0"/>
-              <a:t>3/11/2024</a:t>
+              <a:t>5/4/2026</a:t>
             </a:fld>
             <a:endParaRPr lang="en-US"/>
           </a:p>
@@ -9028,7 +8980,7 @@
           <a:p>
             <a:fld id="{240CDC23-E565-C848-9AF6-12BD09C53D91}" type="datetimeFigureOut">
               <a:rPr lang="en-US" smtClean="0"/>
-              <a:t>3/11/2024</a:t>
+              <a:t>5/4/2026</a:t>
             </a:fld>
             <a:endParaRPr lang="en-US"/>
           </a:p>
@@ -9533,20 +9485,8 @@
           <a:lstStyle/>
           <a:p>
             <a:r>
-              <a:rPr lang="en-US" altLang="zh-TW" dirty="0" smtClean="0"/>
-              <a:t>Chap. 8</a:t>
-            </a:r>
-            <a:r>
               <a:rPr lang="en-US" altLang="zh-TW" dirty="0"/>
-              <a:t>: </a:t>
-            </a:r>
-            <a:r>
-              <a:rPr lang="en-US" altLang="zh-TW" dirty="0" smtClean="0"/>
-              <a:t>Sequence </a:t>
-            </a:r>
-            <a:r>
-              <a:rPr lang="en-US" altLang="zh-TW" dirty="0"/>
-              <a:t>Labeling for Parts of Speech and Named Entities</a:t>
+              <a:t>Chap. 17: Sequence Labeling for Parts of Speech and Named Entities</a:t>
             </a:r>
             <a:endParaRPr lang="zh-TW" altLang="en-US" dirty="0"/>
           </a:p>
@@ -10643,18 +10583,25 @@
           <a:p>
             <a:r>
               <a:rPr lang="en-US" sz="3000" dirty="0"/>
-              <a:t>But those 15% tend to be very </a:t>
-            </a:r>
-            <a:r>
-              <a:rPr lang="en-US" sz="3000" dirty="0" smtClean="0"/>
-              <a:t>common </a:t>
-            </a:r>
-            <a:endParaRPr lang="en-US" sz="3000" dirty="0"/>
+              <a:t>But those 15% tend to be very common </a:t>
+            </a:r>
           </a:p>
           <a:p>
             <a:r>
               <a:rPr lang="en-US" sz="3000" dirty="0"/>
-              <a:t>So ~60% of word tokens are ambiguous</a:t>
+              <a:t>So </a:t>
+            </a:r>
+            <a:r>
+              <a:rPr lang="en-US" sz="3000" dirty="0">
+                <a:solidFill>
+                  <a:srgbClr val="0000FF"/>
+                </a:solidFill>
+              </a:rPr>
+              <a:t>~60%</a:t>
+            </a:r>
+            <a:r>
+              <a:rPr lang="en-US" sz="3000" dirty="0"/>
+              <a:t> of word tokens are ambiguous</a:t>
             </a:r>
           </a:p>
           <a:p>
@@ -10886,7 +10833,7 @@
             <a:r>
               <a:rPr lang="en-US" dirty="0">
                 <a:solidFill>
-                  <a:srgbClr val="0000FF"/>
+                  <a:srgbClr val="FF0000"/>
                 </a:solidFill>
               </a:rPr>
               <a:t>97%</a:t>
@@ -10916,7 +10863,19 @@
           <a:p>
             <a:r>
               <a:rPr lang="en-US" dirty="0"/>
-              <a:t>But baseline is 92%!</a:t>
+              <a:t>But baseline is </a:t>
+            </a:r>
+            <a:r>
+              <a:rPr lang="en-US" dirty="0">
+                <a:solidFill>
+                  <a:srgbClr val="0000FF"/>
+                </a:solidFill>
+              </a:rPr>
+              <a:t>92%</a:t>
+            </a:r>
+            <a:r>
+              <a:rPr lang="en-US" dirty="0"/>
+              <a:t>!</a:t>
             </a:r>
           </a:p>
           <a:p>
@@ -11698,7 +11657,7 @@
               <a:rPr lang="en-US" dirty="0">
                 <a:sym typeface="Symbol" charset="0"/>
               </a:rPr>
-              <a:t> ADJ</a:t>
+              <a:t> ADV</a:t>
             </a:r>
             <a:endParaRPr lang="en-US" dirty="0"/>
           </a:p>
@@ -12320,7 +12279,19 @@
           <a:p>
             <a:r>
               <a:rPr lang="en-US" sz="2800" dirty="0"/>
-              <a:t>All required a hand-labeled training set, all about equal performance (97% on English)</a:t>
+              <a:t>All required a hand-labeled training set, all about equal performance (</a:t>
+            </a:r>
+            <a:r>
+              <a:rPr lang="en-US" sz="2800" dirty="0">
+                <a:solidFill>
+                  <a:srgbClr val="0000FF"/>
+                </a:solidFill>
+              </a:rPr>
+              <a:t>97% </a:t>
+            </a:r>
+            <a:r>
+              <a:rPr lang="en-US" sz="2800" dirty="0"/>
+              <a:t>on English)</a:t>
             </a:r>
           </a:p>
           <a:p>
@@ -12409,7 +12380,7 @@
           <a:lstStyle/>
           <a:p>
             <a:r>
-              <a:rPr lang="en-US" altLang="zh-TW" dirty="0" smtClean="0"/>
+              <a:rPr lang="en-US" altLang="zh-TW" dirty="0"/>
               <a:t>Statistical POS Tagging</a:t>
             </a:r>
             <a:endParaRPr lang="zh-TW" altLang="en-US" dirty="0"/>
@@ -12468,7 +12439,7 @@
           <a:lstStyle/>
           <a:p>
             <a:r>
-              <a:rPr lang="en-US" altLang="zh-TW" dirty="0" smtClean="0">
+              <a:rPr lang="en-US" altLang="zh-TW" dirty="0">
                 <a:solidFill>
                   <a:schemeClr val="bg1">
                     <a:lumMod val="75000"/>
@@ -12478,7 +12449,7 @@
               <a:t>[Source: UIUC CS447 Slides by Julia </a:t>
             </a:r>
             <a:r>
-              <a:rPr lang="en-US" altLang="zh-TW" dirty="0" err="1" smtClean="0">
+              <a:rPr lang="en-US" altLang="zh-TW" dirty="0" err="1">
                 <a:solidFill>
                   <a:schemeClr val="bg1">
                     <a:lumMod val="75000"/>
@@ -12488,7 +12459,7 @@
               <a:t>Hockenmaier</a:t>
             </a:r>
             <a:r>
-              <a:rPr lang="en-US" altLang="zh-TW" dirty="0" smtClean="0">
+              <a:rPr lang="en-US" altLang="zh-TW" dirty="0">
                 <a:solidFill>
                   <a:schemeClr val="bg1">
                     <a:lumMod val="75000"/>
@@ -12553,7 +12524,7 @@
           <a:lstStyle/>
           <a:p>
             <a:r>
-              <a:rPr lang="en-US" altLang="zh-TW" dirty="0" smtClean="0"/>
+              <a:rPr lang="en-US" altLang="zh-TW" dirty="0"/>
               <a:t>POS tagging with generative models</a:t>
             </a:r>
             <a:endParaRPr lang="zh-TW" altLang="en-US" dirty="0"/>
@@ -12577,40 +12548,32 @@
           </a:bodyPr>
           <a:lstStyle/>
           <a:p>
-            <a:endParaRPr lang="en-US" altLang="zh-TW" dirty="0" smtClean="0"/>
-          </a:p>
-          <a:p>
             <a:endParaRPr lang="en-US" altLang="zh-TW" dirty="0"/>
           </a:p>
           <a:p>
-            <a:endParaRPr lang="en-US" altLang="zh-TW" dirty="0" smtClean="0"/>
-          </a:p>
-          <a:p>
-            <a:r>
-              <a:rPr lang="en-US" altLang="zh-TW" dirty="0" smtClean="0"/>
-              <a:t>P(t): the probability that generates the label</a:t>
-            </a:r>
-          </a:p>
-          <a:p>
-            <a:r>
-              <a:rPr lang="en-US" altLang="zh-TW" dirty="0" smtClean="0"/>
+            <a:endParaRPr lang="en-US" altLang="zh-TW" dirty="0"/>
+          </a:p>
+          <a:p>
+            <a:endParaRPr lang="en-US" altLang="zh-TW" dirty="0"/>
+          </a:p>
+          <a:p>
+            <a:r>
+              <a:rPr lang="en-US" altLang="zh-TW" dirty="0"/>
+              <a:t>P(t): the probability that generates the tag</a:t>
+            </a:r>
+          </a:p>
+          <a:p>
+            <a:r>
+              <a:rPr lang="en-US" altLang="zh-TW" dirty="0"/>
               <a:t>P(</a:t>
             </a:r>
             <a:r>
-              <a:rPr lang="en-US" altLang="zh-TW" dirty="0" err="1" smtClean="0"/>
+              <a:rPr lang="en-US" altLang="zh-TW" dirty="0" err="1"/>
               <a:t>w|t</a:t>
             </a:r>
             <a:r>
-              <a:rPr lang="en-US" altLang="zh-TW" dirty="0" smtClean="0"/>
-              <a:t>): </a:t>
-            </a:r>
-            <a:r>
               <a:rPr lang="en-US" altLang="zh-TW" dirty="0"/>
-              <a:t>the probability that </a:t>
-            </a:r>
-            <a:r>
-              <a:rPr lang="en-US" altLang="zh-TW" dirty="0" smtClean="0"/>
-              <a:t>generates the word, based on the label</a:t>
+              <a:t>): the probability that generates the word, based on the tag</a:t>
             </a:r>
             <a:endParaRPr lang="zh-TW" altLang="en-US" dirty="0"/>
           </a:p>
@@ -12669,7 +12632,7 @@
           <a:lstStyle/>
           <a:p>
             <a:r>
-              <a:rPr lang="en-US" altLang="zh-TW" dirty="0" smtClean="0">
+              <a:rPr lang="en-US" altLang="zh-TW" dirty="0">
                 <a:solidFill>
                   <a:schemeClr val="bg1">
                     <a:lumMod val="75000"/>
@@ -12679,7 +12642,7 @@
               <a:t>[Source: UIUC CS447 Slides by Julia </a:t>
             </a:r>
             <a:r>
-              <a:rPr lang="en-US" altLang="zh-TW" dirty="0" err="1" smtClean="0">
+              <a:rPr lang="en-US" altLang="zh-TW" dirty="0" err="1">
                 <a:solidFill>
                   <a:schemeClr val="bg1">
                     <a:lumMod val="75000"/>
@@ -12689,7 +12652,7 @@
               <a:t>Hockenmaier</a:t>
             </a:r>
             <a:r>
-              <a:rPr lang="en-US" altLang="zh-TW" dirty="0" smtClean="0">
+              <a:rPr lang="en-US" altLang="zh-TW" dirty="0">
                 <a:solidFill>
                   <a:schemeClr val="bg1">
                     <a:lumMod val="75000"/>
@@ -12754,7 +12717,7 @@
           <a:lstStyle/>
           <a:p>
             <a:r>
-              <a:rPr lang="en-US" altLang="zh-TW" dirty="0" smtClean="0"/>
+              <a:rPr lang="en-US" altLang="zh-TW" dirty="0"/>
               <a:t>Hidden Markov Models (HMMs)</a:t>
             </a:r>
             <a:endParaRPr lang="zh-TW" altLang="en-US" dirty="0"/>
@@ -12777,29 +12740,13 @@
           <a:lstStyle/>
           <a:p>
             <a:r>
-              <a:rPr lang="en-US" altLang="zh-TW" dirty="0" smtClean="0"/>
-              <a:t>HMMs: the </a:t>
-            </a:r>
-            <a:r>
               <a:rPr lang="en-US" altLang="zh-TW" dirty="0"/>
-              <a:t>most commonly used generative models for POS </a:t>
-            </a:r>
-            <a:r>
-              <a:rPr lang="en-US" altLang="zh-TW" dirty="0" smtClean="0"/>
-              <a:t>tagging </a:t>
-            </a:r>
+              <a:t>HMMs: the most commonly used generative models for POS tagging (and other tasks)</a:t>
+            </a:r>
+          </a:p>
+          <a:p>
             <a:r>
               <a:rPr lang="en-US" altLang="zh-TW" dirty="0"/>
-              <a:t>(and other </a:t>
-            </a:r>
-            <a:r>
-              <a:rPr lang="en-US" altLang="zh-TW" dirty="0" smtClean="0"/>
-              <a:t>tasks)</a:t>
-            </a:r>
-          </a:p>
-          <a:p>
-            <a:r>
-              <a:rPr lang="en-US" altLang="zh-TW" dirty="0" smtClean="0"/>
               <a:t>Independence assumptions:</a:t>
             </a:r>
           </a:p>
@@ -12861,7 +12808,7 @@
           <a:lstStyle/>
           <a:p>
             <a:r>
-              <a:rPr lang="en-US" altLang="zh-TW" dirty="0" smtClean="0">
+              <a:rPr lang="en-US" altLang="zh-TW" dirty="0">
                 <a:solidFill>
                   <a:schemeClr val="bg1">
                     <a:lumMod val="75000"/>
@@ -12871,7 +12818,7 @@
               <a:t>[Source: UIUC CS447 Slides by Julia </a:t>
             </a:r>
             <a:r>
-              <a:rPr lang="en-US" altLang="zh-TW" dirty="0" err="1" smtClean="0">
+              <a:rPr lang="en-US" altLang="zh-TW" dirty="0" err="1">
                 <a:solidFill>
                   <a:schemeClr val="bg1">
                     <a:lumMod val="75000"/>
@@ -12881,7 +12828,7 @@
               <a:t>Hockenmaier</a:t>
             </a:r>
             <a:r>
-              <a:rPr lang="en-US" altLang="zh-TW" dirty="0" smtClean="0">
+              <a:rPr lang="en-US" altLang="zh-TW" dirty="0">
                 <a:solidFill>
                   <a:schemeClr val="bg1">
                     <a:lumMod val="75000"/>
@@ -12946,7 +12893,7 @@
           <a:lstStyle/>
           <a:p>
             <a:r>
-              <a:rPr lang="en-US" altLang="zh-TW" dirty="0" smtClean="0"/>
+              <a:rPr lang="en-US" altLang="zh-TW" dirty="0"/>
               <a:t>Reference</a:t>
             </a:r>
             <a:endParaRPr lang="zh-TW" altLang="en-US" dirty="0"/>
@@ -12969,18 +12916,14 @@
           <a:lstStyle/>
           <a:p>
             <a:r>
-              <a:rPr lang="en-US" altLang="zh-TW" dirty="0" smtClean="0"/>
-              <a:t>Ch.8: Sequence Labelling for Parts of Speech and Named Entities, </a:t>
-            </a:r>
-            <a:r>
-              <a:rPr lang="en-US" altLang="zh-TW" dirty="0" smtClean="0"/>
-              <a:t/>
+              <a:rPr lang="en-US" altLang="zh-TW" dirty="0"/>
+              <a:t>Ch.17: Sequence Labelling for Parts of Speech and Named Entities, </a:t>
             </a:r>
             <a:br>
-              <a:rPr lang="en-US" altLang="zh-TW" dirty="0" smtClean="0"/>
+              <a:rPr lang="en-US" altLang="zh-TW" dirty="0"/>
             </a:br>
             <a:r>
-              <a:rPr lang="en-US" altLang="zh-TW" dirty="0" smtClean="0"/>
+              <a:rPr lang="en-US" altLang="zh-TW" dirty="0"/>
               <a:t>Dan </a:t>
             </a:r>
             <a:r>
@@ -13013,7 +12956,7 @@
           <a:lstStyle/>
           <a:p>
             <a:r>
-              <a:rPr lang="en-US" altLang="zh-TW" smtClean="0"/>
+              <a:rPr lang="en-US" altLang="zh-TW"/>
               <a:t>NLP &amp; TM, Spring 2024</a:t>
             </a:r>
             <a:endParaRPr lang="zh-TW" altLang="en-US"/>
@@ -13036,7 +12979,7 @@
           <a:lstStyle/>
           <a:p>
             <a:r>
-              <a:rPr lang="en-US" altLang="zh-TW" smtClean="0"/>
+              <a:rPr lang="en-US" altLang="zh-TW"/>
               <a:t>NTUT CSIE</a:t>
             </a:r>
             <a:endParaRPr lang="zh-TW" altLang="en-US"/>
@@ -13112,7 +13055,7 @@
           <a:lstStyle/>
           <a:p>
             <a:r>
-              <a:rPr lang="en-US" altLang="zh-TW" dirty="0" smtClean="0"/>
+              <a:rPr lang="en-US" altLang="zh-TW" dirty="0"/>
               <a:t>Hidden Markov Model</a:t>
             </a:r>
             <a:endParaRPr lang="zh-TW" altLang="en-US" dirty="0"/>
@@ -13194,7 +13137,7 @@
           <a:lstStyle/>
           <a:p>
             <a:r>
-              <a:rPr lang="en-US" altLang="zh-TW" dirty="0" smtClean="0"/>
+              <a:rPr lang="en-US" altLang="zh-TW" dirty="0"/>
               <a:t>HMMs as probabilistic automata</a:t>
             </a:r>
             <a:endParaRPr lang="zh-TW" altLang="en-US" dirty="0"/>
@@ -13250,7 +13193,7 @@
           <a:lstStyle/>
           <a:p>
             <a:r>
-              <a:rPr lang="en-US" altLang="zh-TW" dirty="0" smtClean="0">
+              <a:rPr lang="en-US" altLang="zh-TW" dirty="0">
                 <a:solidFill>
                   <a:schemeClr val="bg1">
                     <a:lumMod val="75000"/>
@@ -13260,7 +13203,7 @@
               <a:t>[Source: UIUC CS447 Slides by Julia </a:t>
             </a:r>
             <a:r>
-              <a:rPr lang="en-US" altLang="zh-TW" dirty="0" err="1" smtClean="0">
+              <a:rPr lang="en-US" altLang="zh-TW" dirty="0" err="1">
                 <a:solidFill>
                   <a:schemeClr val="bg1">
                     <a:lumMod val="75000"/>
@@ -13270,7 +13213,7 @@
               <a:t>Hockenmaier</a:t>
             </a:r>
             <a:r>
-              <a:rPr lang="en-US" altLang="zh-TW" dirty="0" smtClean="0">
+              <a:rPr lang="en-US" altLang="zh-TW" dirty="0">
                 <a:solidFill>
                   <a:schemeClr val="bg1">
                     <a:lumMod val="75000"/>
@@ -13337,7 +13280,7 @@
           <a:lstStyle/>
           <a:p>
             <a:r>
-              <a:rPr lang="en-US" altLang="zh-TW" dirty="0" smtClean="0"/>
+              <a:rPr lang="en-US" altLang="zh-TW" dirty="0"/>
               <a:t>Maximum Entropy Markov Models (MEMMs)</a:t>
             </a:r>
             <a:endParaRPr lang="zh-TW" altLang="en-US" dirty="0"/>
@@ -13360,12 +13303,12 @@
           <a:lstStyle/>
           <a:p>
             <a:r>
-              <a:rPr lang="en-US" altLang="zh-TW" dirty="0" smtClean="0"/>
+              <a:rPr lang="en-US" altLang="zh-TW" dirty="0"/>
               <a:t>MEMMs: logistic regression classifier</a:t>
             </a:r>
           </a:p>
           <a:p>
-            <a:endParaRPr lang="en-US" altLang="zh-TW" dirty="0" smtClean="0"/>
+            <a:endParaRPr lang="en-US" altLang="zh-TW" dirty="0"/>
           </a:p>
           <a:p>
             <a:endParaRPr lang="en-US" altLang="zh-TW" dirty="0"/>
@@ -13380,6 +13323,10 @@
               <a:t>f</a:t>
             </a:r>
             <a:r>
+              <a:rPr lang="en-US" altLang="zh-TW" i="1" baseline="-25000" dirty="0"/>
+              <a:t>j</a:t>
+            </a:r>
+            <a:r>
               <a:rPr lang="en-US" altLang="zh-TW" dirty="0"/>
               <a:t>(</a:t>
             </a:r>
@@ -13404,12 +13351,8 @@
               <a:t>i</a:t>
             </a:r>
             <a:r>
-              <a:rPr lang="en-US" altLang="zh-TW" dirty="0" smtClean="0"/>
-              <a:t>)): returns </a:t>
-            </a:r>
-            <a:r>
               <a:rPr lang="en-US" altLang="zh-TW" dirty="0"/>
-              <a:t>an </a:t>
+              <a:t>)): returns an </a:t>
             </a:r>
             <a:r>
               <a:rPr lang="en-US" altLang="zh-TW" i="1" dirty="0"/>
@@ -13429,7 +13372,11 @@
             </a:r>
             <a:r>
               <a:rPr lang="en-US" altLang="zh-TW" dirty="0" err="1"/>
-              <a:t>tj</a:t>
+              <a:t>t</a:t>
+            </a:r>
+            <a:r>
+              <a:rPr lang="en-US" altLang="zh-TW" baseline="-25000" dirty="0" err="1"/>
+              <a:t>j</a:t>
             </a:r>
             <a:r>
               <a:rPr lang="en-US" altLang="zh-TW" dirty="0"/>
@@ -13539,7 +13486,7 @@
           <a:lstStyle/>
           <a:p>
             <a:r>
-              <a:rPr lang="en-US" altLang="zh-TW" dirty="0" smtClean="0"/>
+              <a:rPr lang="en-US" altLang="zh-TW" dirty="0"/>
               <a:t>Conditional Random Fields (CRFs)</a:t>
             </a:r>
             <a:endParaRPr lang="zh-TW" altLang="en-US" dirty="0"/>
@@ -13562,14 +13509,9 @@
           <a:lstStyle/>
           <a:p>
             <a:r>
-              <a:rPr lang="en-US" altLang="zh-TW" dirty="0" smtClean="0"/>
-              <a:t>CRFs </a:t>
-            </a:r>
-            <a:r>
               <a:rPr lang="en-US" altLang="zh-TW" dirty="0"/>
-              <a:t>have the same mathematical definition as MEMMs, but: </a:t>
-            </a:r>
-            <a:endParaRPr lang="en-US" altLang="zh-TW" dirty="0" smtClean="0"/>
+              <a:t>CRFs have the same mathematical definition as MEMMs, but: </a:t>
+            </a:r>
           </a:p>
           <a:p>
             <a:pPr marL="571500" indent="-571500">
@@ -13577,12 +13519,20 @@
               <a:buChar char="-"/>
             </a:pPr>
             <a:r>
-              <a:rPr lang="en-US" altLang="zh-TW" dirty="0" smtClean="0"/>
-              <a:t>CRFs </a:t>
-            </a:r>
-            <a:r>
               <a:rPr lang="en-US" altLang="zh-TW" dirty="0"/>
-              <a:t>are trained globally to maximize the probability of the overall sequence, </a:t>
+              <a:t>CRFs are trained </a:t>
+            </a:r>
+            <a:r>
+              <a:rPr lang="en-US" altLang="zh-TW" dirty="0">
+                <a:solidFill>
+                  <a:srgbClr val="0000FF"/>
+                </a:solidFill>
+              </a:rPr>
+              <a:t>globally</a:t>
+            </a:r>
+            <a:r>
+              <a:rPr lang="en-US" altLang="zh-TW" dirty="0"/>
+              <a:t> to maximize the probability of the overall sequence</a:t>
             </a:r>
           </a:p>
           <a:p>
@@ -13591,14 +13541,21 @@
               <a:buChar char="-"/>
             </a:pPr>
             <a:r>
-              <a:rPr lang="en-US" altLang="zh-TW" dirty="0" smtClean="0"/>
-              <a:t>MEMMs </a:t>
-            </a:r>
-            <a:r>
               <a:rPr lang="en-US" altLang="zh-TW" dirty="0"/>
-              <a:t>are trained locally to maximize the probability of each individual label </a:t>
-            </a:r>
-            <a:endParaRPr lang="en-US" altLang="zh-TW" dirty="0" smtClean="0"/>
+              <a:t>MEMMs are trained </a:t>
+            </a:r>
+            <a:r>
+              <a:rPr lang="en-US" altLang="zh-TW" dirty="0">
+                <a:solidFill>
+                  <a:srgbClr val="0000FF"/>
+                </a:solidFill>
+              </a:rPr>
+              <a:t>locally</a:t>
+            </a:r>
+            <a:r>
+              <a:rPr lang="en-US" altLang="zh-TW" dirty="0"/>
+              <a:t> to maximize the probability of each individual label </a:t>
+            </a:r>
           </a:p>
           <a:p>
             <a:pPr marL="0" indent="0"/>
@@ -13686,7 +13643,7 @@
           <a:lstStyle/>
           <a:p>
             <a:r>
-              <a:rPr lang="en-US" altLang="zh-TW" dirty="0" smtClean="0"/>
+              <a:rPr lang="en-US" altLang="zh-TW" dirty="0"/>
               <a:t>HMM decoding</a:t>
             </a:r>
             <a:endParaRPr lang="zh-TW" altLang="en-US" dirty="0"/>
@@ -13715,43 +13672,42 @@
           </a:bodyPr>
           <a:lstStyle/>
           <a:p>
-            <a:endParaRPr lang="en-US" altLang="zh-TW" dirty="0" smtClean="0"/>
-          </a:p>
-          <a:p>
             <a:endParaRPr lang="en-US" altLang="zh-TW" dirty="0"/>
           </a:p>
           <a:p>
-            <a:endParaRPr lang="en-US" altLang="zh-TW" dirty="0" smtClean="0"/>
-          </a:p>
-          <a:p>
             <a:endParaRPr lang="en-US" altLang="zh-TW" dirty="0"/>
           </a:p>
           <a:p>
-            <a:endParaRPr lang="en-US" altLang="zh-TW" dirty="0" smtClean="0"/>
-          </a:p>
-          <a:p>
             <a:endParaRPr lang="en-US" altLang="zh-TW" dirty="0"/>
           </a:p>
           <a:p>
-            <a:endParaRPr lang="en-US" altLang="zh-TW" dirty="0" smtClean="0"/>
-          </a:p>
-          <a:p>
-            <a:endParaRPr lang="en-US" altLang="zh-TW" dirty="0" smtClean="0"/>
-          </a:p>
-          <a:p>
-            <a:r>
-              <a:rPr lang="en-US" altLang="zh-TW" dirty="0" smtClean="0"/>
+            <a:endParaRPr lang="en-US" altLang="zh-TW" dirty="0"/>
+          </a:p>
+          <a:p>
+            <a:endParaRPr lang="en-US" altLang="zh-TW" dirty="0"/>
+          </a:p>
+          <a:p>
+            <a:endParaRPr lang="en-US" altLang="zh-TW" dirty="0"/>
+          </a:p>
+          <a:p>
+            <a:endParaRPr lang="en-US" altLang="zh-TW" dirty="0"/>
+          </a:p>
+          <a:p>
+            <a:endParaRPr lang="en-US" altLang="zh-TW" dirty="0"/>
+          </a:p>
+          <a:p>
+            <a:r>
+              <a:rPr lang="en-US" altLang="zh-TW" dirty="0"/>
               <a:t>Too many combinations! O(T</a:t>
             </a:r>
             <a:r>
-              <a:rPr lang="en-US" altLang="zh-TW" baseline="30000" dirty="0" smtClean="0"/>
+              <a:rPr lang="en-US" altLang="zh-TW" baseline="30000" dirty="0"/>
               <a:t>N</a:t>
             </a:r>
             <a:r>
-              <a:rPr lang="en-US" altLang="zh-TW" dirty="0" smtClean="0"/>
+              <a:rPr lang="en-US" altLang="zh-TW" dirty="0"/>
               <a:t>)</a:t>
             </a:r>
-            <a:endParaRPr lang="en-US" altLang="zh-TW" dirty="0"/>
           </a:p>
           <a:p>
             <a:endParaRPr lang="zh-TW" altLang="en-US" dirty="0"/>
@@ -13781,7 +13737,7 @@
           <a:lstStyle/>
           <a:p>
             <a:r>
-              <a:rPr lang="en-US" altLang="zh-TW" dirty="0" smtClean="0">
+              <a:rPr lang="en-US" altLang="zh-TW" dirty="0">
                 <a:solidFill>
                   <a:schemeClr val="bg1">
                     <a:lumMod val="75000"/>
@@ -13791,7 +13747,7 @@
               <a:t>[Source: UIUC CS447 Slides by Julia </a:t>
             </a:r>
             <a:r>
-              <a:rPr lang="en-US" altLang="zh-TW" dirty="0" err="1" smtClean="0">
+              <a:rPr lang="en-US" altLang="zh-TW" dirty="0" err="1">
                 <a:solidFill>
                   <a:schemeClr val="bg1">
                     <a:lumMod val="75000"/>
@@ -13801,7 +13757,7 @@
               <a:t>Hockenmaier</a:t>
             </a:r>
             <a:r>
-              <a:rPr lang="en-US" altLang="zh-TW" dirty="0" smtClean="0">
+              <a:rPr lang="en-US" altLang="zh-TW" dirty="0">
                 <a:solidFill>
                   <a:schemeClr val="bg1">
                     <a:lumMod val="75000"/>
@@ -13843,7 +13799,7 @@
           <a:lstStyle/>
           <a:p>
             <a:r>
-              <a:rPr lang="en-US" altLang="zh-TW" sz="3200" dirty="0" smtClean="0">
+              <a:rPr lang="en-US" altLang="zh-TW" sz="3200" dirty="0">
                 <a:solidFill>
                   <a:srgbClr val="FF0000"/>
                 </a:solidFill>
@@ -13933,7 +13889,7 @@
           <a:lstStyle/>
           <a:p>
             <a:r>
-              <a:rPr lang="en-US" altLang="zh-TW" dirty="0" smtClean="0"/>
+              <a:rPr lang="en-US" altLang="zh-TW" dirty="0"/>
               <a:t>Viterbi Algorithm</a:t>
             </a:r>
             <a:endParaRPr lang="zh-TW" altLang="en-US" dirty="0"/>
@@ -13968,12 +13924,8 @@
               <a:t>dynamic programming </a:t>
             </a:r>
             <a:r>
-              <a:rPr lang="en-US" altLang="zh-TW" dirty="0" smtClean="0"/>
-              <a:t>algorithm </a:t>
-            </a:r>
-            <a:r>
               <a:rPr lang="en-US" altLang="zh-TW" dirty="0"/>
-              <a:t>which finds the best (=most probable) tag sequence </a:t>
+              <a:t>algorithm which finds the best (=most probable) tag sequence </a:t>
             </a:r>
             <a:r>
               <a:rPr lang="en-US" altLang="zh-TW" b="1" dirty="0"/>
@@ -14031,34 +13983,29 @@
               <a:rPr lang="en-US" altLang="zh-TW" dirty="0"/>
               <a:t>) </a:t>
             </a:r>
-            <a:endParaRPr lang="en-US" altLang="zh-TW" dirty="0" smtClean="0"/>
-          </a:p>
-          <a:p>
-            <a:r>
-              <a:rPr lang="en-US" altLang="zh-TW" dirty="0" smtClean="0"/>
+          </a:p>
+          <a:p>
+            <a:r>
+              <a:rPr lang="en-US" altLang="zh-TW" dirty="0"/>
               <a:t>Complexity: O(T</a:t>
             </a:r>
             <a:r>
-              <a:rPr lang="en-US" altLang="zh-TW" baseline="30000" dirty="0" smtClean="0"/>
+              <a:rPr lang="en-US" altLang="zh-TW" baseline="30000" dirty="0"/>
               <a:t>2</a:t>
             </a:r>
             <a:r>
-              <a:rPr lang="en-US" altLang="zh-TW" dirty="0" smtClean="0"/>
+              <a:rPr lang="en-US" altLang="zh-TW" dirty="0"/>
               <a:t>N)</a:t>
             </a:r>
           </a:p>
           <a:p>
             <a:r>
               <a:rPr lang="en-US" altLang="zh-TW" dirty="0"/>
-              <a:t>	</a:t>
-            </a:r>
-            <a:r>
-              <a:rPr lang="en-US" altLang="zh-TW" dirty="0" smtClean="0"/>
-              <a:t>- linear in sentence length</a:t>
-            </a:r>
-          </a:p>
-          <a:p>
-            <a:endParaRPr lang="en-US" altLang="zh-TW" dirty="0" smtClean="0"/>
+              <a:t>	- linear in sentence length</a:t>
+            </a:r>
+          </a:p>
+          <a:p>
+            <a:endParaRPr lang="en-US" altLang="zh-TW" dirty="0"/>
           </a:p>
           <a:p>
             <a:endParaRPr lang="en-US" altLang="zh-TW" dirty="0"/>
@@ -14114,7 +14061,7 @@
           <a:lstStyle/>
           <a:p>
             <a:r>
-              <a:rPr lang="en-US" altLang="zh-TW" dirty="0" smtClean="0"/>
+              <a:rPr lang="en-US" altLang="zh-TW" dirty="0"/>
               <a:t>Viterbi</a:t>
             </a:r>
             <a:endParaRPr lang="zh-TW" altLang="en-US" dirty="0"/>
@@ -14170,7 +14117,7 @@
           <a:lstStyle/>
           <a:p>
             <a:r>
-              <a:rPr lang="en-US" altLang="zh-TW" dirty="0" smtClean="0">
+              <a:rPr lang="en-US" altLang="zh-TW" dirty="0">
                 <a:solidFill>
                   <a:schemeClr val="bg1">
                     <a:lumMod val="75000"/>
@@ -14180,7 +14127,7 @@
               <a:t>[Source: UIUC CS447 Slides by Julia </a:t>
             </a:r>
             <a:r>
-              <a:rPr lang="en-US" altLang="zh-TW" dirty="0" err="1" smtClean="0">
+              <a:rPr lang="en-US" altLang="zh-TW" dirty="0" err="1">
                 <a:solidFill>
                   <a:schemeClr val="bg1">
                     <a:lumMod val="75000"/>
@@ -14190,7 +14137,7 @@
               <a:t>Hockenmaier</a:t>
             </a:r>
             <a:r>
-              <a:rPr lang="en-US" altLang="zh-TW" dirty="0" smtClean="0">
+              <a:rPr lang="en-US" altLang="zh-TW" dirty="0">
                 <a:solidFill>
                   <a:schemeClr val="bg1">
                     <a:lumMod val="75000"/>
@@ -14255,7 +14202,7 @@
           <a:lstStyle/>
           <a:p>
             <a:r>
-              <a:rPr lang="en-US" altLang="zh-TW" dirty="0" smtClean="0"/>
+              <a:rPr lang="en-US" altLang="zh-TW" dirty="0"/>
               <a:t>Viterbi</a:t>
             </a:r>
             <a:endParaRPr lang="zh-TW" altLang="en-US" dirty="0"/>
@@ -14311,7 +14258,7 @@
           <a:lstStyle/>
           <a:p>
             <a:r>
-              <a:rPr lang="en-US" altLang="zh-TW" dirty="0" smtClean="0">
+              <a:rPr lang="en-US" altLang="zh-TW" dirty="0">
                 <a:solidFill>
                   <a:schemeClr val="bg1">
                     <a:lumMod val="75000"/>
@@ -14321,7 +14268,7 @@
               <a:t>[Source: UIUC CS447 Slides by Julia </a:t>
             </a:r>
             <a:r>
-              <a:rPr lang="en-US" altLang="zh-TW" dirty="0" err="1" smtClean="0">
+              <a:rPr lang="en-US" altLang="zh-TW" dirty="0" err="1">
                 <a:solidFill>
                   <a:schemeClr val="bg1">
                     <a:lumMod val="75000"/>
@@ -14331,7 +14278,7 @@
               <a:t>Hockenmaier</a:t>
             </a:r>
             <a:r>
-              <a:rPr lang="en-US" altLang="zh-TW" dirty="0" smtClean="0">
+              <a:rPr lang="en-US" altLang="zh-TW" dirty="0">
                 <a:solidFill>
                   <a:schemeClr val="bg1">
                     <a:lumMod val="75000"/>
@@ -14448,7 +14395,7 @@
           <a:lstStyle/>
           <a:p>
             <a:r>
-              <a:rPr lang="en-US" altLang="zh-TW" dirty="0" smtClean="0">
+              <a:rPr lang="en-US" altLang="zh-TW" dirty="0">
                 <a:solidFill>
                   <a:schemeClr val="bg1">
                     <a:lumMod val="75000"/>
@@ -14458,7 +14405,7 @@
               <a:t>[Source: UIUC CS447 Slides by Julia </a:t>
             </a:r>
             <a:r>
-              <a:rPr lang="en-US" altLang="zh-TW" dirty="0" err="1" smtClean="0">
+              <a:rPr lang="en-US" altLang="zh-TW" dirty="0" err="1">
                 <a:solidFill>
                   <a:schemeClr val="bg1">
                     <a:lumMod val="75000"/>
@@ -14468,7 +14415,7 @@
               <a:t>Hockenmaier</a:t>
             </a:r>
             <a:r>
-              <a:rPr lang="en-US" altLang="zh-TW" dirty="0" smtClean="0">
+              <a:rPr lang="en-US" altLang="zh-TW" dirty="0">
                 <a:solidFill>
                   <a:schemeClr val="bg1">
                     <a:lumMod val="75000"/>
@@ -14533,7 +14480,7 @@
           <a:lstStyle/>
           <a:p>
             <a:r>
-              <a:rPr lang="en-US" altLang="zh-TW" dirty="0" smtClean="0"/>
+              <a:rPr lang="en-US" altLang="zh-TW" dirty="0"/>
               <a:t>Viterbi</a:t>
             </a:r>
             <a:endParaRPr lang="zh-TW" altLang="en-US" dirty="0"/>
@@ -14589,7 +14536,7 @@
           <a:lstStyle/>
           <a:p>
             <a:r>
-              <a:rPr lang="en-US" altLang="zh-TW" dirty="0" smtClean="0">
+              <a:rPr lang="en-US" altLang="zh-TW" dirty="0">
                 <a:solidFill>
                   <a:schemeClr val="bg1">
                     <a:lumMod val="75000"/>
@@ -14599,7 +14546,7 @@
               <a:t>[Source: UIUC CS447 Slides by Julia </a:t>
             </a:r>
             <a:r>
-              <a:rPr lang="en-US" altLang="zh-TW" dirty="0" err="1" smtClean="0">
+              <a:rPr lang="en-US" altLang="zh-TW" dirty="0" err="1">
                 <a:solidFill>
                   <a:schemeClr val="bg1">
                     <a:lumMod val="75000"/>
@@ -14609,7 +14556,7 @@
               <a:t>Hockenmaier</a:t>
             </a:r>
             <a:r>
-              <a:rPr lang="en-US" altLang="zh-TW" dirty="0" smtClean="0">
+              <a:rPr lang="en-US" altLang="zh-TW" dirty="0">
                 <a:solidFill>
                   <a:schemeClr val="bg1">
                     <a:lumMod val="75000"/>
@@ -14674,7 +14621,7 @@
           <a:lstStyle/>
           <a:p>
             <a:r>
-              <a:rPr lang="en-US" altLang="zh-TW" dirty="0" smtClean="0"/>
+              <a:rPr lang="en-US" altLang="zh-TW" dirty="0"/>
               <a:t>Outline</a:t>
             </a:r>
             <a:endParaRPr lang="zh-TW" altLang="en-US" dirty="0"/>
@@ -14699,21 +14646,21 @@
           <a:lstStyle/>
           <a:p>
             <a:r>
-              <a:rPr lang="en-US" altLang="zh-TW" dirty="0" smtClean="0"/>
+              <a:rPr lang="en-US" altLang="zh-TW" dirty="0"/>
               <a:t>Part of Speech Tagging</a:t>
             </a:r>
           </a:p>
           <a:p>
             <a:r>
-              <a:rPr lang="en-US" altLang="zh-TW" dirty="0" smtClean="0"/>
+              <a:rPr lang="en-US" altLang="zh-TW" dirty="0"/>
               <a:t>Named Entity Recognition (NER)</a:t>
             </a:r>
           </a:p>
           <a:p>
-            <a:endParaRPr lang="en-US" altLang="zh-TW" dirty="0" smtClean="0"/>
-          </a:p>
-          <a:p>
-            <a:endParaRPr lang="hsb-DE" altLang="zh-TW" dirty="0" smtClean="0"/>
+            <a:endParaRPr lang="en-US" altLang="zh-TW" dirty="0"/>
+          </a:p>
+          <a:p>
+            <a:endParaRPr lang="hsb-DE" altLang="zh-TW" dirty="0"/>
           </a:p>
           <a:p>
             <a:endParaRPr lang="zh-TW" altLang="en-US" dirty="0"/>
@@ -14790,7 +14737,7 @@
           <a:lstStyle/>
           <a:p>
             <a:r>
-              <a:rPr lang="en-US" altLang="zh-TW" dirty="0" smtClean="0"/>
+              <a:rPr lang="en-US" altLang="zh-TW" dirty="0"/>
               <a:t>Viterbi Algorithm</a:t>
             </a:r>
             <a:endParaRPr lang="zh-TW" altLang="en-US" dirty="0"/>
@@ -14846,7 +14793,7 @@
           <a:lstStyle/>
           <a:p>
             <a:r>
-              <a:rPr lang="en-US" altLang="zh-TW" dirty="0" smtClean="0">
+              <a:rPr lang="en-US" altLang="zh-TW" dirty="0">
                 <a:solidFill>
                   <a:schemeClr val="bg1">
                     <a:lumMod val="75000"/>
@@ -14856,7 +14803,7 @@
               <a:t>[Source: UIUC CS447 Slides by Julia </a:t>
             </a:r>
             <a:r>
-              <a:rPr lang="en-US" altLang="zh-TW" dirty="0" err="1" smtClean="0">
+              <a:rPr lang="en-US" altLang="zh-TW" dirty="0" err="1">
                 <a:solidFill>
                   <a:schemeClr val="bg1">
                     <a:lumMod val="75000"/>
@@ -14866,7 +14813,7 @@
               <a:t>Hockenmaier</a:t>
             </a:r>
             <a:r>
-              <a:rPr lang="en-US" altLang="zh-TW" dirty="0" smtClean="0">
+              <a:rPr lang="en-US" altLang="zh-TW" dirty="0">
                 <a:solidFill>
                   <a:schemeClr val="bg1">
                     <a:lumMod val="75000"/>
@@ -14931,7 +14878,7 @@
           <a:lstStyle/>
           <a:p>
             <a:r>
-              <a:rPr lang="en-US" altLang="zh-TW" dirty="0" smtClean="0"/>
+              <a:rPr lang="en-US" altLang="zh-TW" dirty="0"/>
               <a:t>Conditional Random Fields</a:t>
             </a:r>
             <a:endParaRPr lang="zh-TW" altLang="en-US" dirty="0"/>
@@ -15107,7 +15054,7 @@
           <a:lstStyle/>
           <a:p>
             <a:r>
-              <a:rPr lang="en-US" altLang="zh-TW" dirty="0" smtClean="0"/>
+              <a:rPr lang="en-US" altLang="zh-TW" dirty="0"/>
               <a:t>Named Entity Recognition (NER)</a:t>
             </a:r>
             <a:endParaRPr lang="zh-TW" altLang="en-US" dirty="0"/>
@@ -15131,26 +15078,26 @@
           </a:bodyPr>
           <a:lstStyle/>
           <a:p>
-            <a:endParaRPr lang="en-US" altLang="zh-TW" dirty="0" smtClean="0"/>
-          </a:p>
-          <a:p>
             <a:endParaRPr lang="en-US" altLang="zh-TW" dirty="0"/>
           </a:p>
           <a:p>
-            <a:endParaRPr lang="en-US" altLang="zh-TW" dirty="0" smtClean="0"/>
-          </a:p>
-          <a:p>
             <a:endParaRPr lang="en-US" altLang="zh-TW" dirty="0"/>
           </a:p>
           <a:p>
-            <a:endParaRPr lang="en-US" altLang="zh-TW" dirty="0" smtClean="0"/>
-          </a:p>
-          <a:p>
             <a:endParaRPr lang="en-US" altLang="zh-TW" dirty="0"/>
           </a:p>
           <a:p>
-            <a:r>
-              <a:rPr lang="en-US" altLang="zh-TW" dirty="0" smtClean="0"/>
+            <a:endParaRPr lang="en-US" altLang="zh-TW" dirty="0"/>
+          </a:p>
+          <a:p>
+            <a:endParaRPr lang="en-US" altLang="zh-TW" dirty="0"/>
+          </a:p>
+          <a:p>
+            <a:endParaRPr lang="en-US" altLang="zh-TW" dirty="0"/>
+          </a:p>
+          <a:p>
+            <a:r>
+              <a:rPr lang="en-US" altLang="zh-TW" dirty="0"/>
               <a:t>Task: Identify people, organization, locations, dates, …</a:t>
             </a:r>
             <a:endParaRPr lang="zh-TW" altLang="en-US" dirty="0"/>
@@ -15204,7 +15151,7 @@
           <a:lstStyle/>
           <a:p>
             <a:r>
-              <a:rPr lang="en-US" altLang="zh-TW" dirty="0" smtClean="0">
+              <a:rPr lang="en-US" altLang="zh-TW" dirty="0">
                 <a:solidFill>
                   <a:schemeClr val="bg1">
                     <a:lumMod val="75000"/>
@@ -15214,7 +15161,7 @@
               <a:t>[Source: UIUC CS447 Slides by Julia </a:t>
             </a:r>
             <a:r>
-              <a:rPr lang="en-US" altLang="zh-TW" dirty="0" err="1" smtClean="0">
+              <a:rPr lang="en-US" altLang="zh-TW" dirty="0" err="1">
                 <a:solidFill>
                   <a:schemeClr val="bg1">
                     <a:lumMod val="75000"/>
@@ -15224,7 +15171,7 @@
               <a:t>Hockenmaier</a:t>
             </a:r>
             <a:r>
-              <a:rPr lang="en-US" altLang="zh-TW" dirty="0" smtClean="0">
+              <a:rPr lang="en-US" altLang="zh-TW" dirty="0">
                 <a:solidFill>
                   <a:schemeClr val="bg1">
                     <a:lumMod val="75000"/>
@@ -15584,13 +15531,8 @@
             </a:pPr>
             <a:r>
               <a:rPr lang="en-US" dirty="0"/>
-              <a:t>tag the type of the </a:t>
-            </a:r>
-            <a:r>
-              <a:rPr lang="en-US" dirty="0" smtClean="0"/>
-              <a:t>entity </a:t>
-            </a:r>
-            <a:endParaRPr lang="en-US" dirty="0"/>
+              <a:t>tag the type of the entity </a:t>
+            </a:r>
           </a:p>
         </p:txBody>
       </p:sp>
@@ -15782,13 +15724,8 @@
           <a:p>
             <a:r>
               <a:rPr lang="en-US" dirty="0"/>
-              <a:t>Information Extraction: Extracting facts about entities from </a:t>
-            </a:r>
-            <a:r>
-              <a:rPr lang="en-US" dirty="0" smtClean="0"/>
-              <a:t>text</a:t>
-            </a:r>
-            <a:endParaRPr lang="en-US" dirty="0"/>
+              <a:t>Information Extraction: Extracting facts about entities from text</a:t>
+            </a:r>
           </a:p>
           <a:p>
             <a:r>
@@ -15881,7 +15818,11 @@
               <a:buAutoNum type="arabicParenR"/>
             </a:pPr>
             <a:r>
-              <a:rPr lang="en-US" dirty="0"/>
+              <a:rPr lang="en-US" dirty="0">
+                <a:solidFill>
+                  <a:srgbClr val="0000FF"/>
+                </a:solidFill>
+              </a:rPr>
               <a:t>Segmentation</a:t>
             </a:r>
           </a:p>
@@ -15892,13 +15833,8 @@
             </a:pPr>
             <a:r>
               <a:rPr lang="en-US" dirty="0"/>
-              <a:t>In POS tagging, no segmentation problem since each word gets one </a:t>
-            </a:r>
-            <a:r>
-              <a:rPr lang="en-US" dirty="0" smtClean="0"/>
-              <a:t>tag</a:t>
-            </a:r>
-            <a:endParaRPr lang="en-US" dirty="0"/>
+              <a:t>In POS tagging, no segmentation problem since each word gets one tag</a:t>
+            </a:r>
           </a:p>
           <a:p>
             <a:pPr marL="1272103" lvl="1" indent="-742950">
@@ -15907,7 +15843,7 @@
             </a:pPr>
             <a:r>
               <a:rPr lang="en-US" dirty="0"/>
-              <a:t>In NER we have to find and segment the entities!</a:t>
+              <a:t>In NER, we have to find and segment the entities!</a:t>
             </a:r>
           </a:p>
           <a:p>
@@ -15916,7 +15852,15 @@
             </a:pPr>
             <a:r>
               <a:rPr lang="en-US" dirty="0"/>
-              <a:t>Type ambiguity</a:t>
+              <a:t>Type </a:t>
+            </a:r>
+            <a:r>
+              <a:rPr lang="en-US" dirty="0">
+                <a:solidFill>
+                  <a:srgbClr val="0000FF"/>
+                </a:solidFill>
+              </a:rPr>
+              <a:t>ambiguity</a:t>
             </a:r>
           </a:p>
           <a:p>
@@ -16003,7 +15947,7 @@
           <a:lstStyle/>
           <a:p>
             <a:r>
-              <a:rPr lang="en-US" altLang="zh-TW" dirty="0" smtClean="0"/>
+              <a:rPr lang="en-US" altLang="zh-TW" dirty="0"/>
               <a:t>POS tagging revisited</a:t>
             </a:r>
             <a:endParaRPr lang="zh-TW" altLang="en-US" dirty="0"/>
@@ -16032,38 +15976,30 @@
           </a:bodyPr>
           <a:lstStyle/>
           <a:p>
-            <a:endParaRPr lang="en-US" altLang="zh-TW" dirty="0" smtClean="0"/>
-          </a:p>
-          <a:p>
             <a:endParaRPr lang="en-US" altLang="zh-TW" dirty="0"/>
           </a:p>
           <a:p>
-            <a:endParaRPr lang="en-US" altLang="zh-TW" dirty="0" smtClean="0"/>
-          </a:p>
-          <a:p>
             <a:endParaRPr lang="en-US" altLang="zh-TW" dirty="0"/>
           </a:p>
           <a:p>
             <a:endParaRPr lang="en-US" altLang="zh-TW" dirty="0"/>
           </a:p>
           <a:p>
-            <a:endParaRPr lang="en-US" altLang="zh-TW" dirty="0" smtClean="0"/>
-          </a:p>
-          <a:p>
-            <a:endParaRPr lang="en-US" altLang="zh-TW" dirty="0" smtClean="0"/>
-          </a:p>
-          <a:p>
-            <a:r>
-              <a:rPr lang="en-US" altLang="zh-TW" dirty="0" smtClean="0"/>
-              <a:t>Task</a:t>
-            </a:r>
+            <a:endParaRPr lang="en-US" altLang="zh-TW" dirty="0"/>
+          </a:p>
+          <a:p>
+            <a:endParaRPr lang="en-US" altLang="zh-TW" dirty="0"/>
+          </a:p>
+          <a:p>
+            <a:endParaRPr lang="en-US" altLang="zh-TW" dirty="0"/>
+          </a:p>
+          <a:p>
+            <a:endParaRPr lang="en-US" altLang="zh-TW" dirty="0"/>
+          </a:p>
+          <a:p>
             <a:r>
               <a:rPr lang="en-US" altLang="zh-TW" dirty="0"/>
-              <a:t>: </a:t>
-            </a:r>
-            <a:r>
-              <a:rPr lang="en-US" altLang="zh-TW" dirty="0" smtClean="0"/>
-              <a:t>Identify POS tags, …</a:t>
+              <a:t>Task: Identify POS tags, …</a:t>
             </a:r>
             <a:endParaRPr lang="zh-TW" altLang="en-US" dirty="0"/>
           </a:p>
@@ -16116,7 +16052,7 @@
           <a:lstStyle/>
           <a:p>
             <a:r>
-              <a:rPr lang="en-US" altLang="zh-TW" dirty="0" smtClean="0">
+              <a:rPr lang="en-US" altLang="zh-TW" dirty="0">
                 <a:solidFill>
                   <a:schemeClr val="bg1">
                     <a:lumMod val="75000"/>
@@ -16126,7 +16062,7 @@
               <a:t>[Source: UIUC CS447 Slides by Julia </a:t>
             </a:r>
             <a:r>
-              <a:rPr lang="en-US" altLang="zh-TW" dirty="0" err="1" smtClean="0">
+              <a:rPr lang="en-US" altLang="zh-TW" dirty="0" err="1">
                 <a:solidFill>
                   <a:schemeClr val="bg1">
                     <a:lumMod val="75000"/>
@@ -16136,7 +16072,7 @@
               <a:t>Hockenmaier</a:t>
             </a:r>
             <a:r>
-              <a:rPr lang="en-US" altLang="zh-TW" dirty="0" smtClean="0">
+              <a:rPr lang="en-US" altLang="zh-TW" dirty="0">
                 <a:solidFill>
                   <a:schemeClr val="bg1">
                     <a:lumMod val="75000"/>
@@ -16295,7 +16231,7 @@
           <a:lstStyle/>
           <a:p>
             <a:r>
-              <a:rPr lang="en-US" altLang="zh-TW" dirty="0" smtClean="0"/>
+              <a:rPr lang="en-US" altLang="zh-TW" dirty="0"/>
               <a:t>Noun phrase (NP) chunking</a:t>
             </a:r>
             <a:endParaRPr lang="zh-TW" altLang="en-US" dirty="0"/>
@@ -16324,31 +16260,27 @@
           </a:bodyPr>
           <a:lstStyle/>
           <a:p>
-            <a:endParaRPr lang="en-US" altLang="zh-TW" dirty="0" smtClean="0"/>
-          </a:p>
-          <a:p>
             <a:endParaRPr lang="en-US" altLang="zh-TW" dirty="0"/>
           </a:p>
           <a:p>
-            <a:endParaRPr lang="en-US" altLang="zh-TW" dirty="0" smtClean="0"/>
-          </a:p>
-          <a:p>
             <a:endParaRPr lang="en-US" altLang="zh-TW" dirty="0"/>
           </a:p>
           <a:p>
-            <a:endParaRPr lang="en-US" altLang="zh-TW" dirty="0" smtClean="0"/>
-          </a:p>
-          <a:p>
             <a:endParaRPr lang="en-US" altLang="zh-TW" dirty="0"/>
           </a:p>
           <a:p>
+            <a:endParaRPr lang="en-US" altLang="zh-TW" dirty="0"/>
+          </a:p>
+          <a:p>
+            <a:endParaRPr lang="en-US" altLang="zh-TW" dirty="0"/>
+          </a:p>
+          <a:p>
+            <a:endParaRPr lang="en-US" altLang="zh-TW" dirty="0"/>
+          </a:p>
+          <a:p>
             <a:r>
               <a:rPr lang="en-US" altLang="zh-TW" dirty="0"/>
-              <a:t>Task: Identify </a:t>
-            </a:r>
-            <a:r>
-              <a:rPr lang="en-US" altLang="zh-TW" dirty="0" smtClean="0"/>
-              <a:t>noun phrases</a:t>
+              <a:t>Task: Identify noun phrases</a:t>
             </a:r>
             <a:endParaRPr lang="zh-TW" altLang="en-US" dirty="0"/>
           </a:p>
@@ -16377,7 +16309,7 @@
           <a:lstStyle/>
           <a:p>
             <a:r>
-              <a:rPr lang="en-US" altLang="zh-TW" dirty="0" smtClean="0">
+              <a:rPr lang="en-US" altLang="zh-TW" dirty="0">
                 <a:solidFill>
                   <a:schemeClr val="bg1">
                     <a:lumMod val="75000"/>
@@ -16387,7 +16319,7 @@
               <a:t>[Source: UIUC CS447 Slides by Julia </a:t>
             </a:r>
             <a:r>
-              <a:rPr lang="en-US" altLang="zh-TW" dirty="0" err="1" smtClean="0">
+              <a:rPr lang="en-US" altLang="zh-TW" dirty="0" err="1">
                 <a:solidFill>
                   <a:schemeClr val="bg1">
                     <a:lumMod val="75000"/>
@@ -16397,7 +16329,7 @@
               <a:t>Hockenmaier</a:t>
             </a:r>
             <a:r>
-              <a:rPr lang="en-US" altLang="zh-TW" dirty="0" smtClean="0">
+              <a:rPr lang="en-US" altLang="zh-TW" dirty="0">
                 <a:solidFill>
                   <a:schemeClr val="bg1">
                     <a:lumMod val="75000"/>
@@ -16486,7 +16418,7 @@
           <a:lstStyle/>
           <a:p>
             <a:r>
-              <a:rPr lang="en-US" altLang="zh-TW" dirty="0" smtClean="0"/>
+              <a:rPr lang="en-US" altLang="zh-TW" dirty="0"/>
               <a:t>BIO encoding for NP chunking</a:t>
             </a:r>
             <a:endParaRPr lang="zh-TW" altLang="en-US" dirty="0"/>
@@ -16508,19 +16440,19 @@
           <a:bodyPr/>
           <a:lstStyle/>
           <a:p>
-            <a:endParaRPr lang="en-US" altLang="zh-TW" dirty="0" smtClean="0"/>
-          </a:p>
-          <a:p>
             <a:endParaRPr lang="en-US" altLang="zh-TW" dirty="0"/>
           </a:p>
           <a:p>
-            <a:endParaRPr lang="en-US" altLang="zh-TW" dirty="0" smtClean="0"/>
-          </a:p>
-          <a:p>
             <a:endParaRPr lang="en-US" altLang="zh-TW" dirty="0"/>
           </a:p>
           <a:p>
-            <a:endParaRPr lang="en-US" altLang="zh-TW" dirty="0" smtClean="0"/>
+            <a:endParaRPr lang="en-US" altLang="zh-TW" dirty="0"/>
+          </a:p>
+          <a:p>
+            <a:endParaRPr lang="en-US" altLang="zh-TW" dirty="0"/>
+          </a:p>
+          <a:p>
+            <a:endParaRPr lang="en-US" altLang="zh-TW" dirty="0"/>
           </a:p>
           <a:p>
             <a:endParaRPr lang="en-US" altLang="zh-TW" dirty="0"/>
@@ -16560,7 +16492,7 @@
         <p:spPr>
           <a:xfrm>
             <a:off x="2590800" y="5334000"/>
-            <a:ext cx="6629400" cy="923330"/>
+            <a:ext cx="6629400" cy="1015663"/>
           </a:xfrm>
           <a:prstGeom prst="rect">
             <a:avLst/>
@@ -16578,7 +16510,7 @@
               <a:buChar char="-"/>
             </a:pPr>
             <a:r>
-              <a:rPr lang="en-US" altLang="zh-TW" dirty="0" smtClean="0"/>
+              <a:rPr lang="en-US" altLang="zh-TW" sz="2000" dirty="0"/>
               <a:t>B-NP: beginning</a:t>
             </a:r>
           </a:p>
@@ -16588,7 +16520,7 @@
               <a:buChar char="-"/>
             </a:pPr>
             <a:r>
-              <a:rPr lang="en-US" altLang="zh-TW" dirty="0" smtClean="0"/>
+              <a:rPr lang="en-US" altLang="zh-TW" sz="2000" dirty="0"/>
               <a:t>I-NP: inside</a:t>
             </a:r>
           </a:p>
@@ -16598,10 +16530,10 @@
               <a:buChar char="-"/>
             </a:pPr>
             <a:r>
-              <a:rPr lang="en-US" altLang="zh-TW" dirty="0" smtClean="0"/>
+              <a:rPr lang="en-US" altLang="zh-TW" sz="2000" dirty="0"/>
               <a:t>O: outside</a:t>
             </a:r>
-            <a:endParaRPr lang="zh-TW" altLang="en-US" dirty="0"/>
+            <a:endParaRPr lang="zh-TW" altLang="en-US" sz="2000" dirty="0"/>
           </a:p>
         </p:txBody>
       </p:sp>
@@ -16628,7 +16560,7 @@
           <a:lstStyle/>
           <a:p>
             <a:r>
-              <a:rPr lang="en-US" altLang="zh-TW" dirty="0" smtClean="0">
+              <a:rPr lang="en-US" altLang="zh-TW" dirty="0">
                 <a:solidFill>
                   <a:schemeClr val="bg1">
                     <a:lumMod val="75000"/>
@@ -16638,7 +16570,7 @@
               <a:t>[Source: UIUC CS447 Slides by Julia </a:t>
             </a:r>
             <a:r>
-              <a:rPr lang="en-US" altLang="zh-TW" dirty="0" err="1" smtClean="0">
+              <a:rPr lang="en-US" altLang="zh-TW" dirty="0" err="1">
                 <a:solidFill>
                   <a:schemeClr val="bg1">
                     <a:lumMod val="75000"/>
@@ -16648,7 +16580,7 @@
               <a:t>Hockenmaier</a:t>
             </a:r>
             <a:r>
-              <a:rPr lang="en-US" altLang="zh-TW" dirty="0" smtClean="0">
+              <a:rPr lang="en-US" altLang="zh-TW" dirty="0">
                 <a:solidFill>
                   <a:schemeClr val="bg1">
                     <a:lumMod val="75000"/>
@@ -16713,7 +16645,7 @@
           <a:lstStyle/>
           <a:p>
             <a:r>
-              <a:rPr lang="en-US" altLang="zh-TW" dirty="0" smtClean="0"/>
+              <a:rPr lang="en-US" altLang="zh-TW" dirty="0"/>
               <a:t>Shallow Parsing</a:t>
             </a:r>
             <a:endParaRPr lang="zh-TW" altLang="en-US" dirty="0"/>
@@ -16742,31 +16674,27 @@
           </a:bodyPr>
           <a:lstStyle/>
           <a:p>
-            <a:endParaRPr lang="en-US" altLang="zh-TW" dirty="0" smtClean="0"/>
-          </a:p>
-          <a:p>
             <a:endParaRPr lang="en-US" altLang="zh-TW" dirty="0"/>
           </a:p>
           <a:p>
-            <a:endParaRPr lang="en-US" altLang="zh-TW" dirty="0" smtClean="0"/>
-          </a:p>
-          <a:p>
             <a:endParaRPr lang="en-US" altLang="zh-TW" dirty="0"/>
           </a:p>
           <a:p>
-            <a:endParaRPr lang="en-US" altLang="zh-TW" dirty="0" smtClean="0"/>
-          </a:p>
-          <a:p>
             <a:endParaRPr lang="en-US" altLang="zh-TW" dirty="0"/>
           </a:p>
           <a:p>
+            <a:endParaRPr lang="en-US" altLang="zh-TW" dirty="0"/>
+          </a:p>
+          <a:p>
+            <a:endParaRPr lang="en-US" altLang="zh-TW" dirty="0"/>
+          </a:p>
+          <a:p>
+            <a:endParaRPr lang="en-US" altLang="zh-TW" dirty="0"/>
+          </a:p>
+          <a:p>
             <a:r>
               <a:rPr lang="en-US" altLang="zh-TW" dirty="0"/>
-              <a:t>Task: Identify </a:t>
-            </a:r>
-            <a:r>
-              <a:rPr lang="en-US" altLang="zh-TW" dirty="0" smtClean="0"/>
-              <a:t>NP, VP, PP</a:t>
+              <a:t>Task: Identify NP, VP, PP</a:t>
             </a:r>
             <a:endParaRPr lang="zh-TW" altLang="en-US" dirty="0"/>
           </a:p>
@@ -16819,7 +16747,7 @@
           <a:lstStyle/>
           <a:p>
             <a:r>
-              <a:rPr lang="en-US" altLang="zh-TW" dirty="0" smtClean="0">
+              <a:rPr lang="en-US" altLang="zh-TW" dirty="0">
                 <a:solidFill>
                   <a:schemeClr val="bg1">
                     <a:lumMod val="75000"/>
@@ -16829,7 +16757,7 @@
               <a:t>[Source: UIUC CS447 Slides by Julia </a:t>
             </a:r>
             <a:r>
-              <a:rPr lang="en-US" altLang="zh-TW" dirty="0" err="1" smtClean="0">
+              <a:rPr lang="en-US" altLang="zh-TW" dirty="0" err="1">
                 <a:solidFill>
                   <a:schemeClr val="bg1">
                     <a:lumMod val="75000"/>
@@ -16839,7 +16767,7 @@
               <a:t>Hockenmaier</a:t>
             </a:r>
             <a:r>
-              <a:rPr lang="en-US" altLang="zh-TW" dirty="0" smtClean="0">
+              <a:rPr lang="en-US" altLang="zh-TW" dirty="0">
                 <a:solidFill>
                   <a:schemeClr val="bg1">
                     <a:lumMod val="75000"/>
@@ -16904,7 +16832,7 @@
           <a:lstStyle/>
           <a:p>
             <a:r>
-              <a:rPr lang="en-US" altLang="zh-TW" dirty="0" smtClean="0"/>
+              <a:rPr lang="en-US" altLang="zh-TW" dirty="0"/>
               <a:t>BIO encoding for shallow parsing</a:t>
             </a:r>
             <a:endParaRPr lang="zh-TW" altLang="en-US" dirty="0"/>
@@ -16926,19 +16854,19 @@
           <a:bodyPr/>
           <a:lstStyle/>
           <a:p>
-            <a:endParaRPr lang="en-US" altLang="zh-TW" dirty="0" smtClean="0"/>
-          </a:p>
-          <a:p>
             <a:endParaRPr lang="en-US" altLang="zh-TW" dirty="0"/>
           </a:p>
           <a:p>
-            <a:endParaRPr lang="en-US" altLang="zh-TW" dirty="0" smtClean="0"/>
-          </a:p>
-          <a:p>
             <a:endParaRPr lang="en-US" altLang="zh-TW" dirty="0"/>
           </a:p>
           <a:p>
-            <a:endParaRPr lang="en-US" altLang="zh-TW" dirty="0" smtClean="0"/>
+            <a:endParaRPr lang="en-US" altLang="zh-TW" dirty="0"/>
+          </a:p>
+          <a:p>
+            <a:endParaRPr lang="en-US" altLang="zh-TW" dirty="0"/>
+          </a:p>
+          <a:p>
+            <a:endParaRPr lang="en-US" altLang="zh-TW" dirty="0"/>
           </a:p>
           <a:p>
             <a:endParaRPr lang="en-US" altLang="zh-TW" dirty="0"/>
@@ -16954,7 +16882,7 @@
         <p:spPr>
           <a:xfrm>
             <a:off x="2590800" y="5334000"/>
-            <a:ext cx="6629400" cy="923330"/>
+            <a:ext cx="6629400" cy="1015663"/>
           </a:xfrm>
           <a:prstGeom prst="rect">
             <a:avLst/>
@@ -16972,7 +16900,7 @@
               <a:buChar char="-"/>
             </a:pPr>
             <a:r>
-              <a:rPr lang="en-US" altLang="zh-TW" dirty="0" smtClean="0"/>
+              <a:rPr lang="en-US" altLang="zh-TW" sz="2000" dirty="0"/>
               <a:t>B-NP, B-VP, B-PP: beginning</a:t>
             </a:r>
           </a:p>
@@ -16982,7 +16910,7 @@
               <a:buChar char="-"/>
             </a:pPr>
             <a:r>
-              <a:rPr lang="en-US" altLang="zh-TW" dirty="0" smtClean="0"/>
+              <a:rPr lang="en-US" altLang="zh-TW" sz="2000" dirty="0"/>
               <a:t>I-NP, I-VP, I-PP: inside</a:t>
             </a:r>
           </a:p>
@@ -16992,10 +16920,10 @@
               <a:buChar char="-"/>
             </a:pPr>
             <a:r>
-              <a:rPr lang="en-US" altLang="zh-TW" dirty="0" smtClean="0"/>
+              <a:rPr lang="en-US" altLang="zh-TW" sz="2000" dirty="0"/>
               <a:t>O: outside</a:t>
             </a:r>
-            <a:endParaRPr lang="zh-TW" altLang="en-US" dirty="0"/>
+            <a:endParaRPr lang="zh-TW" altLang="en-US" sz="2000" dirty="0"/>
           </a:p>
         </p:txBody>
       </p:sp>
@@ -17022,7 +16950,7 @@
           <a:lstStyle/>
           <a:p>
             <a:r>
-              <a:rPr lang="en-US" altLang="zh-TW" dirty="0" smtClean="0">
+              <a:rPr lang="en-US" altLang="zh-TW" dirty="0">
                 <a:solidFill>
                   <a:schemeClr val="bg1">
                     <a:lumMod val="75000"/>
@@ -17032,7 +16960,7 @@
               <a:t>[Source: UIUC CS447 Slides by Julia </a:t>
             </a:r>
             <a:r>
-              <a:rPr lang="en-US" altLang="zh-TW" dirty="0" err="1" smtClean="0">
+              <a:rPr lang="en-US" altLang="zh-TW" dirty="0" err="1">
                 <a:solidFill>
                   <a:schemeClr val="bg1">
                     <a:lumMod val="75000"/>
@@ -17042,7 +16970,7 @@
               <a:t>Hockenmaier</a:t>
             </a:r>
             <a:r>
-              <a:rPr lang="en-US" altLang="zh-TW" dirty="0" smtClean="0">
+              <a:rPr lang="en-US" altLang="zh-TW" dirty="0">
                 <a:solidFill>
                   <a:schemeClr val="bg1">
                     <a:lumMod val="75000"/>
@@ -17131,7 +17059,7 @@
           <a:lstStyle/>
           <a:p>
             <a:r>
-              <a:rPr lang="en-US" altLang="zh-TW" dirty="0" smtClean="0"/>
+              <a:rPr lang="en-US" altLang="zh-TW" dirty="0"/>
               <a:t>Named Entity Recognition (NER)</a:t>
             </a:r>
             <a:endParaRPr lang="zh-TW" altLang="en-US" dirty="0"/>
@@ -17155,26 +17083,26 @@
           </a:bodyPr>
           <a:lstStyle/>
           <a:p>
-            <a:endParaRPr lang="en-US" altLang="zh-TW" dirty="0" smtClean="0"/>
-          </a:p>
-          <a:p>
             <a:endParaRPr lang="en-US" altLang="zh-TW" dirty="0"/>
           </a:p>
           <a:p>
-            <a:endParaRPr lang="en-US" altLang="zh-TW" dirty="0" smtClean="0"/>
-          </a:p>
-          <a:p>
             <a:endParaRPr lang="en-US" altLang="zh-TW" dirty="0"/>
           </a:p>
           <a:p>
-            <a:endParaRPr lang="en-US" altLang="zh-TW" dirty="0" smtClean="0"/>
-          </a:p>
-          <a:p>
             <a:endParaRPr lang="en-US" altLang="zh-TW" dirty="0"/>
           </a:p>
           <a:p>
-            <a:r>
-              <a:rPr lang="en-US" altLang="zh-TW" dirty="0" smtClean="0"/>
+            <a:endParaRPr lang="en-US" altLang="zh-TW" dirty="0"/>
+          </a:p>
+          <a:p>
+            <a:endParaRPr lang="en-US" altLang="zh-TW" dirty="0"/>
+          </a:p>
+          <a:p>
+            <a:endParaRPr lang="en-US" altLang="zh-TW" dirty="0"/>
+          </a:p>
+          <a:p>
+            <a:r>
+              <a:rPr lang="en-US" altLang="zh-TW" dirty="0"/>
               <a:t>Task: Identify people, organization, locations, dates, …</a:t>
             </a:r>
             <a:endParaRPr lang="zh-TW" altLang="en-US" dirty="0"/>
@@ -17228,7 +17156,7 @@
           <a:lstStyle/>
           <a:p>
             <a:r>
-              <a:rPr lang="en-US" altLang="zh-TW" dirty="0" smtClean="0">
+              <a:rPr lang="en-US" altLang="zh-TW" dirty="0">
                 <a:solidFill>
                   <a:schemeClr val="bg1">
                     <a:lumMod val="75000"/>
@@ -17238,7 +17166,7 @@
               <a:t>[Source: UIUC CS447 Slides by Julia </a:t>
             </a:r>
             <a:r>
-              <a:rPr lang="en-US" altLang="zh-TW" dirty="0" err="1" smtClean="0">
+              <a:rPr lang="en-US" altLang="zh-TW" dirty="0" err="1">
                 <a:solidFill>
                   <a:schemeClr val="bg1">
                     <a:lumMod val="75000"/>
@@ -17248,7 +17176,7 @@
               <a:t>Hockenmaier</a:t>
             </a:r>
             <a:r>
-              <a:rPr lang="en-US" altLang="zh-TW" dirty="0" smtClean="0">
+              <a:rPr lang="en-US" altLang="zh-TW" dirty="0">
                 <a:solidFill>
                   <a:schemeClr val="bg1">
                     <a:lumMod val="75000"/>
@@ -17313,7 +17241,7 @@
           <a:lstStyle/>
           <a:p>
             <a:r>
-              <a:rPr lang="en-US" altLang="zh-TW" dirty="0" smtClean="0"/>
+              <a:rPr lang="en-US" altLang="zh-TW" dirty="0"/>
               <a:t>BIO encoding for NER</a:t>
             </a:r>
             <a:endParaRPr lang="zh-TW" altLang="en-US" dirty="0"/>
@@ -17335,19 +17263,19 @@
           <a:bodyPr/>
           <a:lstStyle/>
           <a:p>
-            <a:endParaRPr lang="en-US" altLang="zh-TW" dirty="0" smtClean="0"/>
-          </a:p>
-          <a:p>
             <a:endParaRPr lang="en-US" altLang="zh-TW" dirty="0"/>
           </a:p>
           <a:p>
-            <a:endParaRPr lang="en-US" altLang="zh-TW" dirty="0" smtClean="0"/>
-          </a:p>
-          <a:p>
             <a:endParaRPr lang="en-US" altLang="zh-TW" dirty="0"/>
           </a:p>
           <a:p>
-            <a:endParaRPr lang="en-US" altLang="zh-TW" dirty="0" smtClean="0"/>
+            <a:endParaRPr lang="en-US" altLang="zh-TW" dirty="0"/>
+          </a:p>
+          <a:p>
+            <a:endParaRPr lang="en-US" altLang="zh-TW" dirty="0"/>
+          </a:p>
+          <a:p>
+            <a:endParaRPr lang="en-US" altLang="zh-TW" dirty="0"/>
           </a:p>
           <a:p>
             <a:endParaRPr lang="en-US" altLang="zh-TW" dirty="0"/>
@@ -17363,7 +17291,7 @@
         <p:spPr>
           <a:xfrm>
             <a:off x="2590800" y="5334000"/>
-            <a:ext cx="6629400" cy="923330"/>
+            <a:ext cx="6629400" cy="1015663"/>
           </a:xfrm>
           <a:prstGeom prst="rect">
             <a:avLst/>
@@ -17381,7 +17309,7 @@
               <a:buChar char="-"/>
             </a:pPr>
             <a:r>
-              <a:rPr lang="en-US" altLang="zh-TW" dirty="0" smtClean="0"/>
+              <a:rPr lang="en-US" altLang="zh-TW" sz="2000" dirty="0"/>
               <a:t>B-PERS, B-ORG: beginning</a:t>
             </a:r>
           </a:p>
@@ -17391,7 +17319,7 @@
               <a:buChar char="-"/>
             </a:pPr>
             <a:r>
-              <a:rPr lang="en-US" altLang="zh-TW" dirty="0" smtClean="0"/>
+              <a:rPr lang="en-US" altLang="zh-TW" sz="2000" dirty="0"/>
               <a:t>I-PERS, I-ORG: inside</a:t>
             </a:r>
           </a:p>
@@ -17401,10 +17329,10 @@
               <a:buChar char="-"/>
             </a:pPr>
             <a:r>
-              <a:rPr lang="en-US" altLang="zh-TW" dirty="0" smtClean="0"/>
+              <a:rPr lang="en-US" altLang="zh-TW" sz="2000" dirty="0"/>
               <a:t>O: outside</a:t>
             </a:r>
-            <a:endParaRPr lang="zh-TW" altLang="en-US" dirty="0"/>
+            <a:endParaRPr lang="zh-TW" altLang="en-US" sz="2000" dirty="0"/>
           </a:p>
         </p:txBody>
       </p:sp>
@@ -17431,7 +17359,7 @@
           <a:lstStyle/>
           <a:p>
             <a:r>
-              <a:rPr lang="en-US" altLang="zh-TW" dirty="0" smtClean="0">
+              <a:rPr lang="en-US" altLang="zh-TW" dirty="0">
                 <a:solidFill>
                   <a:schemeClr val="bg1">
                     <a:lumMod val="75000"/>
@@ -17441,7 +17369,7 @@
               <a:t>[Source: UIUC CS447 Slides by Julia </a:t>
             </a:r>
             <a:r>
-              <a:rPr lang="en-US" altLang="zh-TW" dirty="0" err="1" smtClean="0">
+              <a:rPr lang="en-US" altLang="zh-TW" dirty="0" err="1">
                 <a:solidFill>
                   <a:schemeClr val="bg1">
                     <a:lumMod val="75000"/>
@@ -17451,7 +17379,7 @@
               <a:t>Hockenmaier</a:t>
             </a:r>
             <a:r>
-              <a:rPr lang="en-US" altLang="zh-TW" dirty="0" smtClean="0">
+              <a:rPr lang="en-US" altLang="zh-TW" dirty="0">
                 <a:solidFill>
                   <a:schemeClr val="bg1">
                     <a:lumMod val="75000"/>
@@ -17540,7 +17468,7 @@
           <a:lstStyle/>
           <a:p>
             <a:r>
-              <a:rPr lang="en-US" altLang="zh-TW" dirty="0" smtClean="0"/>
+              <a:rPr lang="en-US" altLang="zh-TW" dirty="0"/>
               <a:t>Sequence Labeling</a:t>
             </a:r>
             <a:endParaRPr lang="zh-TW" altLang="en-US" dirty="0"/>
@@ -17563,19 +17491,19 @@
           <a:lstStyle/>
           <a:p>
             <a:r>
-              <a:rPr lang="en-US" altLang="zh-TW" dirty="0" smtClean="0"/>
+              <a:rPr lang="en-US" altLang="zh-TW" dirty="0"/>
               <a:t>Input: a sequence of n tokens/words</a:t>
             </a:r>
           </a:p>
           <a:p>
             <a:r>
-              <a:rPr lang="en-US" altLang="zh-TW" dirty="0" smtClean="0"/>
+              <a:rPr lang="en-US" altLang="zh-TW" dirty="0"/>
               <a:t>Output: a sequence of n labels, such that each token/word is associated with a label</a:t>
             </a:r>
           </a:p>
           <a:p>
             <a:r>
-              <a:rPr lang="en-US" altLang="zh-TW" dirty="0" smtClean="0"/>
+              <a:rPr lang="en-US" altLang="zh-TW" dirty="0"/>
               <a:t>BIO encoding for:</a:t>
             </a:r>
           </a:p>
@@ -17585,7 +17513,7 @@
               <a:buChar char="-"/>
             </a:pPr>
             <a:r>
-              <a:rPr lang="en-US" altLang="zh-TW" dirty="0" smtClean="0"/>
+              <a:rPr lang="en-US" altLang="zh-TW" dirty="0"/>
               <a:t>NP chunking</a:t>
             </a:r>
           </a:p>
@@ -17595,7 +17523,7 @@
               <a:buChar char="-"/>
             </a:pPr>
             <a:r>
-              <a:rPr lang="en-US" altLang="zh-TW" dirty="0" smtClean="0"/>
+              <a:rPr lang="en-US" altLang="zh-TW" dirty="0"/>
               <a:t>Shallow parsing</a:t>
             </a:r>
           </a:p>
@@ -17605,7 +17533,7 @@
               <a:buChar char="-"/>
             </a:pPr>
             <a:r>
-              <a:rPr lang="en-US" altLang="zh-TW" dirty="0" smtClean="0"/>
+              <a:rPr lang="en-US" altLang="zh-TW" dirty="0"/>
               <a:t>Named entity recognition</a:t>
             </a:r>
             <a:endParaRPr lang="zh-TW" altLang="en-US" dirty="0"/>
@@ -18127,12 +18055,20 @@
             </a:r>
           </a:p>
           <a:p>
+            <a:pPr marL="571500" indent="-571500">
+              <a:buFont typeface="Arial" panose="020B0604020202020204" pitchFamily="34" charset="0"/>
+              <a:buChar char="•"/>
+            </a:pPr>
             <a:r>
               <a:rPr lang="en-US" dirty="0"/>
-              <a:t>	1 O tag, </a:t>
-            </a:r>
-          </a:p>
-          <a:p>
+              <a:t>1 O tag, </a:t>
+            </a:r>
+          </a:p>
+          <a:p>
+            <a:pPr marL="571500" indent="-571500">
+              <a:buFont typeface="Arial" panose="020B0604020202020204" pitchFamily="34" charset="0"/>
+              <a:buChar char="•"/>
+            </a:pPr>
             <a:r>
               <a:rPr lang="en-US" i="1" dirty="0"/>
               <a:t>n</a:t>
@@ -18143,6 +18079,10 @@
             </a:r>
           </a:p>
           <a:p>
+            <a:pPr marL="571500" indent="-571500">
+              <a:buFont typeface="Arial" panose="020B0604020202020204" pitchFamily="34" charset="0"/>
+              <a:buChar char="•"/>
+            </a:pPr>
             <a:r>
               <a:rPr lang="en-US" i="1" dirty="0"/>
               <a:t>n</a:t>
@@ -18376,13 +18316,8 @@
             </a:pPr>
             <a:r>
               <a:rPr lang="en-US" dirty="0"/>
-              <a:t>These categories are relevant for NLP </a:t>
-            </a:r>
-            <a:r>
-              <a:rPr lang="en-US" dirty="0" smtClean="0"/>
-              <a:t>today</a:t>
-            </a:r>
-            <a:endParaRPr lang="en-US" dirty="0"/>
+              <a:t>These categories are relevant for NLP today</a:t>
+            </a:r>
           </a:p>
           <a:p>
             <a:endParaRPr lang="en-US" dirty="0"/>
@@ -18741,11 +18676,11 @@
           <a:lstStyle/>
           <a:p>
             <a:r>
-              <a:rPr lang="en-US" altLang="zh-TW" dirty="0" smtClean="0"/>
+              <a:rPr lang="en-US" altLang="zh-TW" dirty="0"/>
               <a:t>Thanks for </a:t>
             </a:r>
             <a:r>
-              <a:rPr lang="en-US" altLang="zh-TW" smtClean="0"/>
+              <a:rPr lang="en-US" altLang="zh-TW"/>
               <a:t>Your Attention!</a:t>
             </a:r>
             <a:endParaRPr lang="zh-TW" altLang="en-US"/>
@@ -25070,26 +25005,20 @@
           <a:p>
             <a:r>
               <a:rPr lang="en-US" dirty="0"/>
-              <a:t>Assigning a part-of-speech to each word in a </a:t>
-            </a:r>
-            <a:r>
-              <a:rPr lang="en-US" dirty="0" smtClean="0"/>
-              <a:t>text </a:t>
-            </a:r>
-            <a:endParaRPr lang="en-US" dirty="0"/>
+              <a:t>Assigning a part-of-speech to each word in a text </a:t>
+            </a:r>
           </a:p>
           <a:p>
             <a:r>
               <a:rPr lang="en-US" dirty="0"/>
-              <a:t>Words often have more than one </a:t>
-            </a:r>
-            <a:r>
-              <a:rPr lang="en-US" dirty="0" smtClean="0"/>
-              <a:t>POS</a:t>
-            </a:r>
-            <a:endParaRPr lang="en-US" dirty="0"/>
-          </a:p>
-          <a:p>
+              <a:t>Words often have more than one POS</a:t>
+            </a:r>
+          </a:p>
+          <a:p>
+            <a:r>
+              <a:rPr lang="en-US" dirty="0"/>
+              <a:t>For example, </a:t>
+            </a:r>
             <a:r>
               <a:rPr lang="en-US" b="1" dirty="0"/>
               <a:t>book</a:t>
@@ -25139,10 +25068,9 @@
               <a:t>book</a:t>
             </a:r>
             <a:r>
-              <a:rPr lang="en-US" dirty="0" smtClean="0"/>
+              <a:rPr lang="en-US" dirty="0"/>
               <a:t>)</a:t>
             </a:r>
-            <a:endParaRPr lang="en-US" dirty="0"/>
           </a:p>
         </p:txBody>
       </p:sp>
